--- a/ДипломПрезентацияБурденюк2026.pptx
+++ b/ДипломПрезентацияБурденюк2026.pptx
@@ -153,7 +153,7 @@
       </p:grpSpPr>
       <p:sp>
         <p:nvSpPr>
-          <p:cNvPr id="1368918573" name="Верхний колонтитул 1"/>
+          <p:cNvPr id="1452694938" name="Верхний колонтитул 1"/>
           <p:cNvSpPr>
             <a:spLocks noGrp="1"/>
           </p:cNvSpPr>
@@ -187,7 +187,7 @@
       </p:sp>
       <p:sp>
         <p:nvSpPr>
-          <p:cNvPr id="419087821" name="Дата 2"/>
+          <p:cNvPr id="932084914" name="Дата 2"/>
           <p:cNvSpPr>
             <a:spLocks noGrp="1"/>
           </p:cNvSpPr>
@@ -225,7 +225,7 @@
       </p:sp>
       <p:sp>
         <p:nvSpPr>
-          <p:cNvPr id="1731367078" name="Рисунок 3"/>
+          <p:cNvPr id="1787231882" name="Рисунок 3"/>
           <p:cNvSpPr>
             <a:spLocks noChangeAspect="1" noGrp="1" noRot="1"/>
           </p:cNvSpPr>
@@ -261,7 +261,7 @@
       </p:sp>
       <p:sp>
         <p:nvSpPr>
-          <p:cNvPr id="694222323" name="Заметка 4"/>
+          <p:cNvPr id="491981403" name="Заметка 4"/>
           <p:cNvSpPr>
             <a:spLocks noGrp="1"/>
           </p:cNvSpPr>
@@ -335,7 +335,7 @@
       </p:sp>
       <p:sp>
         <p:nvSpPr>
-          <p:cNvPr id="1793404035" name="Нижний колонтитул 5"/>
+          <p:cNvPr id="2115742431" name="Нижний колонтитул 5"/>
           <p:cNvSpPr>
             <a:spLocks noGrp="1"/>
           </p:cNvSpPr>
@@ -369,7 +369,7 @@
       </p:sp>
       <p:sp>
         <p:nvSpPr>
-          <p:cNvPr id="1431876931" name="Номер слайда 6"/>
+          <p:cNvPr id="537866860" name="Номер слайда 6"/>
           <p:cNvSpPr>
             <a:spLocks noGrp="1"/>
           </p:cNvSpPr>
@@ -522,7 +522,7 @@
       </p:grpSpPr>
       <p:sp>
         <p:nvSpPr>
-          <p:cNvPr id="1721605595" name="Рисунок 1"/>
+          <p:cNvPr id="1588431728" name="Рисунок 1"/>
           <p:cNvSpPr>
             <a:spLocks noChangeAspect="1" noGrp="1" noRot="1"/>
           </p:cNvSpPr>
@@ -539,7 +539,7 @@
       </p:sp>
       <p:sp>
         <p:nvSpPr>
-          <p:cNvPr id="786534288" name="Текст 2"/>
+          <p:cNvPr id="1103806780" name="Текст 2"/>
           <p:cNvSpPr>
             <a:spLocks noGrp="1"/>
           </p:cNvSpPr>
@@ -564,7 +564,7 @@
       </p:sp>
       <p:sp>
         <p:nvSpPr>
-          <p:cNvPr id="1858752245" name="Номер слайда 3"/>
+          <p:cNvPr id="1716580514" name="Номер слайда 3"/>
           <p:cNvSpPr>
             <a:spLocks noGrp="1"/>
           </p:cNvSpPr>
@@ -615,7 +615,7 @@
       </p:grpSpPr>
       <p:sp>
         <p:nvSpPr>
-          <p:cNvPr id="1039833353" name="Slide Image Placeholder 1"/>
+          <p:cNvPr id="709566512" name="Slide Image Placeholder 1"/>
           <p:cNvSpPr>
             <a:spLocks noChangeAspect="1" noGrp="1" noRot="1"/>
           </p:cNvSpPr>
@@ -627,7 +627,7 @@
       </p:sp>
       <p:sp>
         <p:nvSpPr>
-          <p:cNvPr id="1495542316" name="Notes Placeholder 2"/>
+          <p:cNvPr id="958888" name="Notes Placeholder 2"/>
           <p:cNvSpPr>
             <a:spLocks noGrp="1"/>
           </p:cNvSpPr>
@@ -649,7 +649,7 @@
       </p:sp>
       <p:sp>
         <p:nvSpPr>
-          <p:cNvPr id="1886965636" name="Slide Number Placeholder 3"/>
+          <p:cNvPr id="1098690659" name="Slide Number Placeholder 3"/>
           <p:cNvSpPr>
             <a:spLocks noGrp="1"/>
           </p:cNvSpPr>
@@ -700,7 +700,7 @@
       </p:grpSpPr>
       <p:sp>
         <p:nvSpPr>
-          <p:cNvPr id="161834611" name="Slide Image Placeholder 1"/>
+          <p:cNvPr id="2017601385" name="Slide Image Placeholder 1"/>
           <p:cNvSpPr>
             <a:spLocks noChangeAspect="1" noGrp="1" noRot="1"/>
           </p:cNvSpPr>
@@ -712,7 +712,7 @@
       </p:sp>
       <p:sp>
         <p:nvSpPr>
-          <p:cNvPr id="1025852341" name="Notes Placeholder 2"/>
+          <p:cNvPr id="1915515058" name="Notes Placeholder 2"/>
           <p:cNvSpPr>
             <a:spLocks noGrp="1"/>
           </p:cNvSpPr>
@@ -734,7 +734,7 @@
       </p:sp>
       <p:sp>
         <p:nvSpPr>
-          <p:cNvPr id="706150937" name="Slide Number Placeholder 3"/>
+          <p:cNvPr id="145034662" name="Slide Number Placeholder 3"/>
           <p:cNvSpPr>
             <a:spLocks noGrp="1"/>
           </p:cNvSpPr>
@@ -785,7 +785,7 @@
       </p:grpSpPr>
       <p:sp>
         <p:nvSpPr>
-          <p:cNvPr id="1427480984" name="Slide Image Placeholder 1"/>
+          <p:cNvPr id="837156517" name="Slide Image Placeholder 1"/>
           <p:cNvSpPr>
             <a:spLocks noChangeAspect="1" noGrp="1" noRot="1"/>
           </p:cNvSpPr>
@@ -797,7 +797,7 @@
       </p:sp>
       <p:sp>
         <p:nvSpPr>
-          <p:cNvPr id="550212282" name="Notes Placeholder 2"/>
+          <p:cNvPr id="769162895" name="Notes Placeholder 2"/>
           <p:cNvSpPr>
             <a:spLocks noGrp="1"/>
           </p:cNvSpPr>
@@ -819,7 +819,7 @@
       </p:sp>
       <p:sp>
         <p:nvSpPr>
-          <p:cNvPr id="867402366" name="Slide Number Placeholder 3"/>
+          <p:cNvPr id="1694293360" name="Slide Number Placeholder 3"/>
           <p:cNvSpPr>
             <a:spLocks noGrp="1"/>
           </p:cNvSpPr>
@@ -870,7 +870,7 @@
       </p:grpSpPr>
       <p:sp>
         <p:nvSpPr>
-          <p:cNvPr id="1616438979" name="Slide Image Placeholder 1"/>
+          <p:cNvPr id="2084306565" name="Slide Image Placeholder 1"/>
           <p:cNvSpPr>
             <a:spLocks noChangeAspect="1" noGrp="1" noRot="1"/>
           </p:cNvSpPr>
@@ -882,7 +882,7 @@
       </p:sp>
       <p:sp>
         <p:nvSpPr>
-          <p:cNvPr id="1250184327" name="Notes Placeholder 2"/>
+          <p:cNvPr id="1687489748" name="Notes Placeholder 2"/>
           <p:cNvSpPr>
             <a:spLocks noGrp="1"/>
           </p:cNvSpPr>
@@ -904,7 +904,7 @@
       </p:sp>
       <p:sp>
         <p:nvSpPr>
-          <p:cNvPr id="35652107" name="Slide Number Placeholder 3"/>
+          <p:cNvPr id="1746237268" name="Slide Number Placeholder 3"/>
           <p:cNvSpPr>
             <a:spLocks noGrp="1"/>
           </p:cNvSpPr>
@@ -955,7 +955,7 @@
       </p:grpSpPr>
       <p:sp>
         <p:nvSpPr>
-          <p:cNvPr id="2028759700" name="Slide Image Placeholder 1"/>
+          <p:cNvPr id="1894491267" name="Slide Image Placeholder 1"/>
           <p:cNvSpPr>
             <a:spLocks noChangeAspect="1" noGrp="1" noRot="1"/>
           </p:cNvSpPr>
@@ -967,7 +967,7 @@
       </p:sp>
       <p:sp>
         <p:nvSpPr>
-          <p:cNvPr id="33482473" name="Notes Placeholder 2"/>
+          <p:cNvPr id="483245761" name="Notes Placeholder 2"/>
           <p:cNvSpPr>
             <a:spLocks noGrp="1"/>
           </p:cNvSpPr>
@@ -989,7 +989,7 @@
       </p:sp>
       <p:sp>
         <p:nvSpPr>
-          <p:cNvPr id="1467819345" name="Slide Number Placeholder 3"/>
+          <p:cNvPr id="1451403402" name="Slide Number Placeholder 3"/>
           <p:cNvSpPr>
             <a:spLocks noGrp="1"/>
           </p:cNvSpPr>
@@ -1040,7 +1040,7 @@
       </p:grpSpPr>
       <p:sp>
         <p:nvSpPr>
-          <p:cNvPr id="1660282734" name="Slide Image Placeholder 1"/>
+          <p:cNvPr id="632305107" name="Slide Image Placeholder 1"/>
           <p:cNvSpPr>
             <a:spLocks noChangeAspect="1" noGrp="1" noRot="1"/>
           </p:cNvSpPr>
@@ -1052,7 +1052,7 @@
       </p:sp>
       <p:sp>
         <p:nvSpPr>
-          <p:cNvPr id="1862095379" name="Notes Placeholder 2"/>
+          <p:cNvPr id="962014428" name="Notes Placeholder 2"/>
           <p:cNvSpPr>
             <a:spLocks noGrp="1"/>
           </p:cNvSpPr>
@@ -1068,13 +1068,17 @@
             <a:pPr>
               <a:defRPr/>
             </a:pPr>
+            <a:r>
+              <a:rPr lang="ru-RU"/>
+              <a:t>Архитектура программы</a:t>
+            </a:r>
             <a:endParaRPr/>
           </a:p>
         </p:txBody>
       </p:sp>
       <p:sp>
         <p:nvSpPr>
-          <p:cNvPr id="1396698926" name="Slide Number Placeholder 3"/>
+          <p:cNvPr id="2057903527" name="Slide Number Placeholder 3"/>
           <p:cNvSpPr>
             <a:spLocks noGrp="1"/>
           </p:cNvSpPr>
@@ -1125,7 +1129,7 @@
       </p:grpSpPr>
       <p:sp>
         <p:nvSpPr>
-          <p:cNvPr id="850032847" name="Slide Image Placeholder 1"/>
+          <p:cNvPr id="1289024477" name="Slide Image Placeholder 1"/>
           <p:cNvSpPr>
             <a:spLocks noChangeAspect="1" noGrp="1" noRot="1"/>
           </p:cNvSpPr>
@@ -1137,7 +1141,7 @@
       </p:sp>
       <p:sp>
         <p:nvSpPr>
-          <p:cNvPr id="888991386" name="Notes Placeholder 2"/>
+          <p:cNvPr id="1819742452" name="Notes Placeholder 2"/>
           <p:cNvSpPr>
             <a:spLocks noGrp="1"/>
           </p:cNvSpPr>
@@ -1159,7 +1163,7 @@
       </p:sp>
       <p:sp>
         <p:nvSpPr>
-          <p:cNvPr id="157751579" name="Slide Number Placeholder 3"/>
+          <p:cNvPr id="722078349" name="Slide Number Placeholder 3"/>
           <p:cNvSpPr>
             <a:spLocks noGrp="1"/>
           </p:cNvSpPr>
@@ -1210,7 +1214,7 @@
       </p:grpSpPr>
       <p:sp>
         <p:nvSpPr>
-          <p:cNvPr id="1699742424" name="Slide Image Placeholder 1"/>
+          <p:cNvPr id="977858474" name="Slide Image Placeholder 1"/>
           <p:cNvSpPr>
             <a:spLocks noChangeAspect="1" noGrp="1" noRot="1"/>
           </p:cNvSpPr>
@@ -1222,7 +1226,7 @@
       </p:sp>
       <p:sp>
         <p:nvSpPr>
-          <p:cNvPr id="1631947751" name="Notes Placeholder 2"/>
+          <p:cNvPr id="1640584849" name="Notes Placeholder 2"/>
           <p:cNvSpPr>
             <a:spLocks noGrp="1"/>
           </p:cNvSpPr>
@@ -1244,7 +1248,7 @@
       </p:sp>
       <p:sp>
         <p:nvSpPr>
-          <p:cNvPr id="650875580" name="Slide Number Placeholder 3"/>
+          <p:cNvPr id="49248581" name="Slide Number Placeholder 3"/>
           <p:cNvSpPr>
             <a:spLocks noGrp="1"/>
           </p:cNvSpPr>
@@ -1295,7 +1299,7 @@
       </p:grpSpPr>
       <p:sp>
         <p:nvSpPr>
-          <p:cNvPr id="1322749432" name="Slide Image Placeholder 1"/>
+          <p:cNvPr id="600471797" name="Slide Image Placeholder 1"/>
           <p:cNvSpPr>
             <a:spLocks noChangeAspect="1" noGrp="1" noRot="1"/>
           </p:cNvSpPr>
@@ -1307,7 +1311,7 @@
       </p:sp>
       <p:sp>
         <p:nvSpPr>
-          <p:cNvPr id="1211553811" name="Notes Placeholder 2"/>
+          <p:cNvPr id="827580486" name="Notes Placeholder 2"/>
           <p:cNvSpPr>
             <a:spLocks noGrp="1"/>
           </p:cNvSpPr>
@@ -1329,7 +1333,7 @@
       </p:sp>
       <p:sp>
         <p:nvSpPr>
-          <p:cNvPr id="1761761841" name="Slide Number Placeholder 3"/>
+          <p:cNvPr id="1762478931" name="Slide Number Placeholder 3"/>
           <p:cNvSpPr>
             <a:spLocks noGrp="1"/>
           </p:cNvSpPr>
@@ -1380,7 +1384,7 @@
       </p:grpSpPr>
       <p:sp>
         <p:nvSpPr>
-          <p:cNvPr id="1121451916" name="Slide Image Placeholder 1"/>
+          <p:cNvPr id="1483431767" name="Slide Image Placeholder 1"/>
           <p:cNvSpPr>
             <a:spLocks noChangeAspect="1" noGrp="1" noRot="1"/>
           </p:cNvSpPr>
@@ -1392,7 +1396,7 @@
       </p:sp>
       <p:sp>
         <p:nvSpPr>
-          <p:cNvPr id="1304676180" name="Notes Placeholder 2"/>
+          <p:cNvPr id="88448819" name="Notes Placeholder 2"/>
           <p:cNvSpPr>
             <a:spLocks noGrp="1"/>
           </p:cNvSpPr>
@@ -1414,7 +1418,7 @@
       </p:sp>
       <p:sp>
         <p:nvSpPr>
-          <p:cNvPr id="337519153" name="Slide Number Placeholder 3"/>
+          <p:cNvPr id="820325715" name="Slide Number Placeholder 3"/>
           <p:cNvSpPr>
             <a:spLocks noGrp="1"/>
           </p:cNvSpPr>
@@ -1465,7 +1469,7 @@
       </p:grpSpPr>
       <p:sp>
         <p:nvSpPr>
-          <p:cNvPr id="591758512" name="Slide Image Placeholder 1"/>
+          <p:cNvPr id="355287737" name="Slide Image Placeholder 1"/>
           <p:cNvSpPr>
             <a:spLocks noChangeAspect="1" noGrp="1" noRot="1"/>
           </p:cNvSpPr>
@@ -1477,7 +1481,7 @@
       </p:sp>
       <p:sp>
         <p:nvSpPr>
-          <p:cNvPr id="615240235" name="Notes Placeholder 2"/>
+          <p:cNvPr id="65013171" name="Notes Placeholder 2"/>
           <p:cNvSpPr>
             <a:spLocks noGrp="1"/>
           </p:cNvSpPr>
@@ -1499,7 +1503,7 @@
       </p:sp>
       <p:sp>
         <p:nvSpPr>
-          <p:cNvPr id="1307044802" name="Slide Number Placeholder 3"/>
+          <p:cNvPr id="1135576330" name="Slide Number Placeholder 3"/>
           <p:cNvSpPr>
             <a:spLocks noGrp="1"/>
           </p:cNvSpPr>
@@ -1550,7 +1554,7 @@
       </p:grpSpPr>
       <p:sp>
         <p:nvSpPr>
-          <p:cNvPr id="1750133519" name="Slide Image Placeholder 1"/>
+          <p:cNvPr id="404146908" name="Slide Image Placeholder 1"/>
           <p:cNvSpPr>
             <a:spLocks noChangeAspect="1" noGrp="1" noRot="1"/>
           </p:cNvSpPr>
@@ -1562,7 +1566,7 @@
       </p:sp>
       <p:sp>
         <p:nvSpPr>
-          <p:cNvPr id="2022211756" name="Notes Placeholder 2"/>
+          <p:cNvPr id="1192729869" name="Notes Placeholder 2"/>
           <p:cNvSpPr>
             <a:spLocks noGrp="1"/>
           </p:cNvSpPr>
@@ -1584,7 +1588,7 @@
       </p:sp>
       <p:sp>
         <p:nvSpPr>
-          <p:cNvPr id="1488674477" name="Slide Number Placeholder 3"/>
+          <p:cNvPr id="1319768817" name="Slide Number Placeholder 3"/>
           <p:cNvSpPr>
             <a:spLocks noGrp="1"/>
           </p:cNvSpPr>
@@ -1635,7 +1639,7 @@
       </p:grpSpPr>
       <p:sp>
         <p:nvSpPr>
-          <p:cNvPr id="1718693479" name="Slide Image Placeholder 1"/>
+          <p:cNvPr id="1023260055" name="Slide Image Placeholder 1"/>
           <p:cNvSpPr>
             <a:spLocks noChangeAspect="1" noGrp="1" noRot="1"/>
           </p:cNvSpPr>
@@ -1647,7 +1651,7 @@
       </p:sp>
       <p:sp>
         <p:nvSpPr>
-          <p:cNvPr id="679725535" name="Notes Placeholder 2"/>
+          <p:cNvPr id="224099242" name="Notes Placeholder 2"/>
           <p:cNvSpPr>
             <a:spLocks noGrp="1"/>
           </p:cNvSpPr>
@@ -1669,7 +1673,7 @@
       </p:sp>
       <p:sp>
         <p:nvSpPr>
-          <p:cNvPr id="1105916984" name="Slide Number Placeholder 3"/>
+          <p:cNvPr id="582849411" name="Slide Number Placeholder 3"/>
           <p:cNvSpPr>
             <a:spLocks noGrp="1"/>
           </p:cNvSpPr>
@@ -1720,7 +1724,7 @@
       </p:grpSpPr>
       <p:sp>
         <p:nvSpPr>
-          <p:cNvPr id="2032553754" name="Slide Image Placeholder 1"/>
+          <p:cNvPr id="642977249" name="Slide Image Placeholder 1"/>
           <p:cNvSpPr>
             <a:spLocks noChangeAspect="1" noGrp="1" noRot="1"/>
           </p:cNvSpPr>
@@ -1732,7 +1736,7 @@
       </p:sp>
       <p:sp>
         <p:nvSpPr>
-          <p:cNvPr id="1760604891" name="Notes Placeholder 2"/>
+          <p:cNvPr id="602047521" name="Notes Placeholder 2"/>
           <p:cNvSpPr>
             <a:spLocks noGrp="1"/>
           </p:cNvSpPr>
@@ -1754,7 +1758,7 @@
       </p:sp>
       <p:sp>
         <p:nvSpPr>
-          <p:cNvPr id="275422776" name="Slide Number Placeholder 3"/>
+          <p:cNvPr id="523846889" name="Slide Number Placeholder 3"/>
           <p:cNvSpPr>
             <a:spLocks noGrp="1"/>
           </p:cNvSpPr>
@@ -1805,7 +1809,7 @@
       </p:grpSpPr>
       <p:sp>
         <p:nvSpPr>
-          <p:cNvPr id="1936023706" name="Slide Image Placeholder 1"/>
+          <p:cNvPr id="1927658389" name="Slide Image Placeholder 1"/>
           <p:cNvSpPr>
             <a:spLocks noChangeAspect="1" noGrp="1" noRot="1"/>
           </p:cNvSpPr>
@@ -1817,7 +1821,7 @@
       </p:sp>
       <p:sp>
         <p:nvSpPr>
-          <p:cNvPr id="670494521" name="Notes Placeholder 2"/>
+          <p:cNvPr id="272085566" name="Notes Placeholder 2"/>
           <p:cNvSpPr>
             <a:spLocks noGrp="1"/>
           </p:cNvSpPr>
@@ -1839,7 +1843,7 @@
       </p:sp>
       <p:sp>
         <p:nvSpPr>
-          <p:cNvPr id="1123646624" name="Slide Number Placeholder 3"/>
+          <p:cNvPr id="1671955713" name="Slide Number Placeholder 3"/>
           <p:cNvSpPr>
             <a:spLocks noGrp="1"/>
           </p:cNvSpPr>
@@ -1890,7 +1894,7 @@
       </p:grpSpPr>
       <p:sp>
         <p:nvSpPr>
-          <p:cNvPr id="253901755" name="Slide Image Placeholder 1"/>
+          <p:cNvPr id="1849292364" name="Slide Image Placeholder 1"/>
           <p:cNvSpPr>
             <a:spLocks noChangeAspect="1" noGrp="1" noRot="1"/>
           </p:cNvSpPr>
@@ -1902,7 +1906,7 @@
       </p:sp>
       <p:sp>
         <p:nvSpPr>
-          <p:cNvPr id="1193978773" name="Notes Placeholder 2"/>
+          <p:cNvPr id="1502422137" name="Notes Placeholder 2"/>
           <p:cNvSpPr>
             <a:spLocks noGrp="1"/>
           </p:cNvSpPr>
@@ -1924,7 +1928,7 @@
       </p:sp>
       <p:sp>
         <p:nvSpPr>
-          <p:cNvPr id="393158359" name="Slide Number Placeholder 3"/>
+          <p:cNvPr id="1429908569" name="Slide Number Placeholder 3"/>
           <p:cNvSpPr>
             <a:spLocks noGrp="1"/>
           </p:cNvSpPr>
@@ -1975,7 +1979,7 @@
       </p:grpSpPr>
       <p:sp>
         <p:nvSpPr>
-          <p:cNvPr id="1024003562" name="Slide Image Placeholder 1"/>
+          <p:cNvPr id="907621075" name="Slide Image Placeholder 1"/>
           <p:cNvSpPr>
             <a:spLocks noChangeAspect="1" noGrp="1" noRot="1"/>
           </p:cNvSpPr>
@@ -1987,7 +1991,7 @@
       </p:sp>
       <p:sp>
         <p:nvSpPr>
-          <p:cNvPr id="767908460" name="Notes Placeholder 2"/>
+          <p:cNvPr id="1669736322" name="Notes Placeholder 2"/>
           <p:cNvSpPr>
             <a:spLocks noGrp="1"/>
           </p:cNvSpPr>
@@ -2009,7 +2013,7 @@
       </p:sp>
       <p:sp>
         <p:nvSpPr>
-          <p:cNvPr id="47988000" name="Slide Number Placeholder 3"/>
+          <p:cNvPr id="1289163594" name="Slide Number Placeholder 3"/>
           <p:cNvSpPr>
             <a:spLocks noGrp="1"/>
           </p:cNvSpPr>
@@ -2060,7 +2064,7 @@
       </p:grpSpPr>
       <p:sp>
         <p:nvSpPr>
-          <p:cNvPr id="1443545115" name="Slide Image Placeholder 1"/>
+          <p:cNvPr id="611936617" name="Slide Image Placeholder 1"/>
           <p:cNvSpPr>
             <a:spLocks noChangeAspect="1" noGrp="1" noRot="1"/>
           </p:cNvSpPr>
@@ -2072,7 +2076,7 @@
       </p:sp>
       <p:sp>
         <p:nvSpPr>
-          <p:cNvPr id="282279183" name="Notes Placeholder 2"/>
+          <p:cNvPr id="886852030" name="Notes Placeholder 2"/>
           <p:cNvSpPr>
             <a:spLocks noGrp="1"/>
           </p:cNvSpPr>
@@ -2088,13 +2092,17 @@
             <a:pPr>
               <a:defRPr/>
             </a:pPr>
+            <a:r>
+              <a:rPr/>
+              <a:t>Цвет + больше размер</a:t>
+            </a:r>
             <a:endParaRPr/>
           </a:p>
         </p:txBody>
       </p:sp>
       <p:sp>
         <p:nvSpPr>
-          <p:cNvPr id="1111523915" name="Slide Number Placeholder 3"/>
+          <p:cNvPr id="227204441" name="Slide Number Placeholder 3"/>
           <p:cNvSpPr>
             <a:spLocks noGrp="1"/>
           </p:cNvSpPr>
@@ -2145,7 +2153,7 @@
       </p:grpSpPr>
       <p:sp>
         <p:nvSpPr>
-          <p:cNvPr id="433405800" name="Slide Image Placeholder 1"/>
+          <p:cNvPr id="594884673" name="Slide Image Placeholder 1"/>
           <p:cNvSpPr>
             <a:spLocks noChangeAspect="1" noGrp="1" noRot="1"/>
           </p:cNvSpPr>
@@ -2157,7 +2165,7 @@
       </p:sp>
       <p:sp>
         <p:nvSpPr>
-          <p:cNvPr id="1074565075" name="Notes Placeholder 2"/>
+          <p:cNvPr id="1575144982" name="Notes Placeholder 2"/>
           <p:cNvSpPr>
             <a:spLocks noGrp="1"/>
           </p:cNvSpPr>
@@ -2179,7 +2187,7 @@
       </p:sp>
       <p:sp>
         <p:nvSpPr>
-          <p:cNvPr id="280787477" name="Slide Number Placeholder 3"/>
+          <p:cNvPr id="16358980" name="Slide Number Placeholder 3"/>
           <p:cNvSpPr>
             <a:spLocks noGrp="1"/>
           </p:cNvSpPr>
@@ -2230,7 +2238,7 @@
       </p:grpSpPr>
       <p:sp>
         <p:nvSpPr>
-          <p:cNvPr id="519276286" name="Заголовок 1"/>
+          <p:cNvPr id="1856023503" name="Заголовок 1"/>
           <p:cNvSpPr>
             <a:spLocks noGrp="1"/>
           </p:cNvSpPr>
@@ -2265,7 +2273,7 @@
       </p:sp>
       <p:sp>
         <p:nvSpPr>
-          <p:cNvPr id="1039184304" name="Подзаголовок 2"/>
+          <p:cNvPr id="1627503192" name="Подзаголовок 2"/>
           <p:cNvSpPr>
             <a:spLocks noGrp="1"/>
           </p:cNvSpPr>
@@ -2333,7 +2341,7 @@
       </p:sp>
       <p:sp>
         <p:nvSpPr>
-          <p:cNvPr id="1375412685" name="Дата 3"/>
+          <p:cNvPr id="810082532" name="Дата 3"/>
           <p:cNvSpPr>
             <a:spLocks noGrp="1"/>
           </p:cNvSpPr>
@@ -2359,7 +2367,7 @@
       </p:sp>
       <p:sp>
         <p:nvSpPr>
-          <p:cNvPr id="70320301" name="Нижний колонтитул 4"/>
+          <p:cNvPr id="313852758" name="Нижний колонтитул 4"/>
           <p:cNvSpPr>
             <a:spLocks noGrp="1"/>
           </p:cNvSpPr>
@@ -2381,7 +2389,7 @@
       </p:sp>
       <p:sp>
         <p:nvSpPr>
-          <p:cNvPr id="53344263" name="Номер слайда 5"/>
+          <p:cNvPr id="2095217079" name="Номер слайда 5"/>
           <p:cNvSpPr>
             <a:spLocks noGrp="1"/>
           </p:cNvSpPr>
@@ -2432,7 +2440,7 @@
       </p:grpSpPr>
       <p:sp>
         <p:nvSpPr>
-          <p:cNvPr id="452750658" name="Заголовок 1"/>
+          <p:cNvPr id="278557938" name="Заголовок 1"/>
           <p:cNvSpPr>
             <a:spLocks noGrp="1"/>
           </p:cNvSpPr>
@@ -2458,7 +2466,7 @@
       </p:sp>
       <p:sp>
         <p:nvSpPr>
-          <p:cNvPr id="1138182969" name="Вертикальный текст 2"/>
+          <p:cNvPr id="2032837501" name="Вертикальный текст 2"/>
           <p:cNvSpPr>
             <a:spLocks noGrp="1"/>
           </p:cNvSpPr>
@@ -2524,7 +2532,7 @@
       </p:sp>
       <p:sp>
         <p:nvSpPr>
-          <p:cNvPr id="91886604" name="Дата 3"/>
+          <p:cNvPr id="1783123461" name="Дата 3"/>
           <p:cNvSpPr>
             <a:spLocks noGrp="1"/>
           </p:cNvSpPr>
@@ -2550,7 +2558,7 @@
       </p:sp>
       <p:sp>
         <p:nvSpPr>
-          <p:cNvPr id="78162674" name="Нижний колонтитул 4"/>
+          <p:cNvPr id="1339331240" name="Нижний колонтитул 4"/>
           <p:cNvSpPr>
             <a:spLocks noGrp="1"/>
           </p:cNvSpPr>
@@ -2572,7 +2580,7 @@
       </p:sp>
       <p:sp>
         <p:nvSpPr>
-          <p:cNvPr id="610803225" name="Номер слайда 5"/>
+          <p:cNvPr id="35854183" name="Номер слайда 5"/>
           <p:cNvSpPr>
             <a:spLocks noGrp="1"/>
           </p:cNvSpPr>
@@ -2623,7 +2631,7 @@
       </p:grpSpPr>
       <p:sp>
         <p:nvSpPr>
-          <p:cNvPr id="361476441" name="Вертикальный заголовок 1"/>
+          <p:cNvPr id="914669114" name="Вертикальный заголовок 1"/>
           <p:cNvSpPr>
             <a:spLocks noGrp="1"/>
           </p:cNvSpPr>
@@ -2654,7 +2662,7 @@
       </p:sp>
       <p:sp>
         <p:nvSpPr>
-          <p:cNvPr id="460976131" name="Вертикальный текст 2"/>
+          <p:cNvPr id="1431748838" name="Вертикальный текст 2"/>
           <p:cNvSpPr>
             <a:spLocks noGrp="1"/>
           </p:cNvSpPr>
@@ -2725,7 +2733,7 @@
       </p:sp>
       <p:sp>
         <p:nvSpPr>
-          <p:cNvPr id="2038417027" name="Дата 3"/>
+          <p:cNvPr id="1638227643" name="Дата 3"/>
           <p:cNvSpPr>
             <a:spLocks noGrp="1"/>
           </p:cNvSpPr>
@@ -2751,7 +2759,7 @@
       </p:sp>
       <p:sp>
         <p:nvSpPr>
-          <p:cNvPr id="309199679" name="Нижний колонтитул 4"/>
+          <p:cNvPr id="318898400" name="Нижний колонтитул 4"/>
           <p:cNvSpPr>
             <a:spLocks noGrp="1"/>
           </p:cNvSpPr>
@@ -2773,7 +2781,7 @@
       </p:sp>
       <p:sp>
         <p:nvSpPr>
-          <p:cNvPr id="1393418261" name="Номер слайда 5"/>
+          <p:cNvPr id="22394242" name="Номер слайда 5"/>
           <p:cNvSpPr>
             <a:spLocks noGrp="1"/>
           </p:cNvSpPr>
@@ -2824,7 +2832,7 @@
       </p:grpSpPr>
       <p:sp>
         <p:nvSpPr>
-          <p:cNvPr id="959213897" name="Заголовок 1"/>
+          <p:cNvPr id="560380532" name="Заголовок 1"/>
           <p:cNvSpPr>
             <a:spLocks noGrp="1"/>
           </p:cNvSpPr>
@@ -2850,7 +2858,7 @@
       </p:sp>
       <p:sp>
         <p:nvSpPr>
-          <p:cNvPr id="738085052" name="Объект 2"/>
+          <p:cNvPr id="439667930" name="Объект 2"/>
           <p:cNvSpPr>
             <a:spLocks noGrp="1"/>
           </p:cNvSpPr>
@@ -2916,7 +2924,7 @@
       </p:sp>
       <p:sp>
         <p:nvSpPr>
-          <p:cNvPr id="1691748158" name="Дата 3"/>
+          <p:cNvPr id="183648343" name="Дата 3"/>
           <p:cNvSpPr>
             <a:spLocks noGrp="1"/>
           </p:cNvSpPr>
@@ -2942,7 +2950,7 @@
       </p:sp>
       <p:sp>
         <p:nvSpPr>
-          <p:cNvPr id="268834236" name="Нижний колонтитул 4"/>
+          <p:cNvPr id="1028316917" name="Нижний колонтитул 4"/>
           <p:cNvSpPr>
             <a:spLocks noGrp="1"/>
           </p:cNvSpPr>
@@ -2964,7 +2972,7 @@
       </p:sp>
       <p:sp>
         <p:nvSpPr>
-          <p:cNvPr id="457317346" name="Номер слайда 5"/>
+          <p:cNvPr id="1232518655" name="Номер слайда 5"/>
           <p:cNvSpPr>
             <a:spLocks noGrp="1"/>
           </p:cNvSpPr>
@@ -3015,7 +3023,7 @@
       </p:grpSpPr>
       <p:sp>
         <p:nvSpPr>
-          <p:cNvPr id="1016172739" name="Заголовок 1"/>
+          <p:cNvPr id="2084408277" name="Заголовок 1"/>
           <p:cNvSpPr>
             <a:spLocks noGrp="1"/>
           </p:cNvSpPr>
@@ -3050,7 +3058,7 @@
       </p:sp>
       <p:sp>
         <p:nvSpPr>
-          <p:cNvPr id="1493912817" name="Текст 2"/>
+          <p:cNvPr id="1445039062" name="Текст 2"/>
           <p:cNvSpPr>
             <a:spLocks noGrp="1"/>
           </p:cNvSpPr>
@@ -3172,7 +3180,7 @@
       </p:sp>
       <p:sp>
         <p:nvSpPr>
-          <p:cNvPr id="2109909134" name="Дата 3"/>
+          <p:cNvPr id="1586384459" name="Дата 3"/>
           <p:cNvSpPr>
             <a:spLocks noGrp="1"/>
           </p:cNvSpPr>
@@ -3198,7 +3206,7 @@
       </p:sp>
       <p:sp>
         <p:nvSpPr>
-          <p:cNvPr id="1422372356" name="Нижний колонтитул 4"/>
+          <p:cNvPr id="226841461" name="Нижний колонтитул 4"/>
           <p:cNvSpPr>
             <a:spLocks noGrp="1"/>
           </p:cNvSpPr>
@@ -3220,7 +3228,7 @@
       </p:sp>
       <p:sp>
         <p:nvSpPr>
-          <p:cNvPr id="1247164483" name="Номер слайда 5"/>
+          <p:cNvPr id="900401592" name="Номер слайда 5"/>
           <p:cNvSpPr>
             <a:spLocks noGrp="1"/>
           </p:cNvSpPr>
@@ -3271,7 +3279,7 @@
       </p:grpSpPr>
       <p:sp>
         <p:nvSpPr>
-          <p:cNvPr id="870540255" name="Заголовок 1"/>
+          <p:cNvPr id="1604369119" name="Заголовок 1"/>
           <p:cNvSpPr>
             <a:spLocks noGrp="1"/>
           </p:cNvSpPr>
@@ -3297,7 +3305,7 @@
       </p:sp>
       <p:sp>
         <p:nvSpPr>
-          <p:cNvPr id="1787622360" name="Объект 2"/>
+          <p:cNvPr id="623334565" name="Объект 2"/>
           <p:cNvSpPr>
             <a:spLocks noGrp="1"/>
           </p:cNvSpPr>
@@ -3368,7 +3376,7 @@
       </p:sp>
       <p:sp>
         <p:nvSpPr>
-          <p:cNvPr id="622972745" name="Объект 3"/>
+          <p:cNvPr id="403435144" name="Объект 3"/>
           <p:cNvSpPr>
             <a:spLocks noGrp="1"/>
           </p:cNvSpPr>
@@ -3439,7 +3447,7 @@
       </p:sp>
       <p:sp>
         <p:nvSpPr>
-          <p:cNvPr id="1757632527" name="Дата 4"/>
+          <p:cNvPr id="936082210" name="Дата 4"/>
           <p:cNvSpPr>
             <a:spLocks noGrp="1"/>
           </p:cNvSpPr>
@@ -3465,7 +3473,7 @@
       </p:sp>
       <p:sp>
         <p:nvSpPr>
-          <p:cNvPr id="65214490" name="Нижний колонтитул 5"/>
+          <p:cNvPr id="674404543" name="Нижний колонтитул 5"/>
           <p:cNvSpPr>
             <a:spLocks noGrp="1"/>
           </p:cNvSpPr>
@@ -3487,7 +3495,7 @@
       </p:sp>
       <p:sp>
         <p:nvSpPr>
-          <p:cNvPr id="1960332970" name="Номер слайда 6"/>
+          <p:cNvPr id="1334479514" name="Номер слайда 6"/>
           <p:cNvSpPr>
             <a:spLocks noGrp="1"/>
           </p:cNvSpPr>
@@ -3538,7 +3546,7 @@
       </p:grpSpPr>
       <p:sp>
         <p:nvSpPr>
-          <p:cNvPr id="394739031" name="Заголовок 1"/>
+          <p:cNvPr id="1943289017" name="Заголовок 1"/>
           <p:cNvSpPr>
             <a:spLocks noGrp="1"/>
           </p:cNvSpPr>
@@ -3569,7 +3577,7 @@
       </p:sp>
       <p:sp>
         <p:nvSpPr>
-          <p:cNvPr id="232497862" name="Текст 2"/>
+          <p:cNvPr id="617564863" name="Текст 2"/>
           <p:cNvSpPr>
             <a:spLocks noGrp="1"/>
           </p:cNvSpPr>
@@ -3637,7 +3645,7 @@
       </p:sp>
       <p:sp>
         <p:nvSpPr>
-          <p:cNvPr id="1275962290" name="Объект 3"/>
+          <p:cNvPr id="309616699" name="Объект 3"/>
           <p:cNvSpPr>
             <a:spLocks noGrp="1"/>
           </p:cNvSpPr>
@@ -3708,7 +3716,7 @@
       </p:sp>
       <p:sp>
         <p:nvSpPr>
-          <p:cNvPr id="185311508" name="Текст 4"/>
+          <p:cNvPr id="1945215043" name="Текст 4"/>
           <p:cNvSpPr>
             <a:spLocks noGrp="1"/>
           </p:cNvSpPr>
@@ -3776,7 +3784,7 @@
       </p:sp>
       <p:sp>
         <p:nvSpPr>
-          <p:cNvPr id="1480659269" name="Объект 5"/>
+          <p:cNvPr id="860678289" name="Объект 5"/>
           <p:cNvSpPr>
             <a:spLocks noGrp="1"/>
           </p:cNvSpPr>
@@ -3847,7 +3855,7 @@
       </p:sp>
       <p:sp>
         <p:nvSpPr>
-          <p:cNvPr id="828718205" name="Дата 6"/>
+          <p:cNvPr id="589743144" name="Дата 6"/>
           <p:cNvSpPr>
             <a:spLocks noGrp="1"/>
           </p:cNvSpPr>
@@ -3873,7 +3881,7 @@
       </p:sp>
       <p:sp>
         <p:nvSpPr>
-          <p:cNvPr id="765070503" name="Нижний колонтитул 7"/>
+          <p:cNvPr id="2130379052" name="Нижний колонтитул 7"/>
           <p:cNvSpPr>
             <a:spLocks noGrp="1"/>
           </p:cNvSpPr>
@@ -3895,7 +3903,7 @@
       </p:sp>
       <p:sp>
         <p:nvSpPr>
-          <p:cNvPr id="1731965988" name="Номер слайда 8"/>
+          <p:cNvPr id="864553299" name="Номер слайда 8"/>
           <p:cNvSpPr>
             <a:spLocks noGrp="1"/>
           </p:cNvSpPr>
@@ -3946,7 +3954,7 @@
       </p:grpSpPr>
       <p:sp>
         <p:nvSpPr>
-          <p:cNvPr id="2108671845" name="Заголовок 1"/>
+          <p:cNvPr id="1253941446" name="Заголовок 1"/>
           <p:cNvSpPr>
             <a:spLocks noGrp="1"/>
           </p:cNvSpPr>
@@ -3972,7 +3980,7 @@
       </p:sp>
       <p:sp>
         <p:nvSpPr>
-          <p:cNvPr id="903677806" name="Дата 2"/>
+          <p:cNvPr id="388761318" name="Дата 2"/>
           <p:cNvSpPr>
             <a:spLocks noGrp="1"/>
           </p:cNvSpPr>
@@ -3998,7 +4006,7 @@
       </p:sp>
       <p:sp>
         <p:nvSpPr>
-          <p:cNvPr id="147310660" name="Нижний колонтитул 3"/>
+          <p:cNvPr id="1006621461" name="Нижний колонтитул 3"/>
           <p:cNvSpPr>
             <a:spLocks noGrp="1"/>
           </p:cNvSpPr>
@@ -4020,7 +4028,7 @@
       </p:sp>
       <p:sp>
         <p:nvSpPr>
-          <p:cNvPr id="1494084318" name="Номер слайда 4"/>
+          <p:cNvPr id="1990331771" name="Номер слайда 4"/>
           <p:cNvSpPr>
             <a:spLocks noGrp="1"/>
           </p:cNvSpPr>
@@ -4071,7 +4079,7 @@
       </p:grpSpPr>
       <p:sp>
         <p:nvSpPr>
-          <p:cNvPr id="1022341183" name="Дата 1"/>
+          <p:cNvPr id="1036214048" name="Дата 1"/>
           <p:cNvSpPr>
             <a:spLocks noGrp="1"/>
           </p:cNvSpPr>
@@ -4097,7 +4105,7 @@
       </p:sp>
       <p:sp>
         <p:nvSpPr>
-          <p:cNvPr id="1284626632" name="Нижний колонтитул 2"/>
+          <p:cNvPr id="299309245" name="Нижний колонтитул 2"/>
           <p:cNvSpPr>
             <a:spLocks noGrp="1"/>
           </p:cNvSpPr>
@@ -4119,7 +4127,7 @@
       </p:sp>
       <p:sp>
         <p:nvSpPr>
-          <p:cNvPr id="1370451446" name="Номер слайда 3"/>
+          <p:cNvPr id="1096514479" name="Номер слайда 3"/>
           <p:cNvSpPr>
             <a:spLocks noGrp="1"/>
           </p:cNvSpPr>
@@ -4170,7 +4178,7 @@
       </p:grpSpPr>
       <p:sp>
         <p:nvSpPr>
-          <p:cNvPr id="1106577075" name="Заголовок 1"/>
+          <p:cNvPr id="312553239" name="Заголовок 1"/>
           <p:cNvSpPr>
             <a:spLocks noGrp="1"/>
           </p:cNvSpPr>
@@ -4205,7 +4213,7 @@
       </p:sp>
       <p:sp>
         <p:nvSpPr>
-          <p:cNvPr id="1792173127" name="Объект 2"/>
+          <p:cNvPr id="1730243949" name="Объект 2"/>
           <p:cNvSpPr>
             <a:spLocks noGrp="1"/>
           </p:cNvSpPr>
@@ -4304,7 +4312,7 @@
       </p:sp>
       <p:sp>
         <p:nvSpPr>
-          <p:cNvPr id="2118755988" name="Текст 3"/>
+          <p:cNvPr id="1944472346" name="Текст 3"/>
           <p:cNvSpPr>
             <a:spLocks noGrp="1"/>
           </p:cNvSpPr>
@@ -4372,7 +4380,7 @@
       </p:sp>
       <p:sp>
         <p:nvSpPr>
-          <p:cNvPr id="1308700167" name="Дата 4"/>
+          <p:cNvPr id="150582123" name="Дата 4"/>
           <p:cNvSpPr>
             <a:spLocks noGrp="1"/>
           </p:cNvSpPr>
@@ -4398,7 +4406,7 @@
       </p:sp>
       <p:sp>
         <p:nvSpPr>
-          <p:cNvPr id="679489137" name="Нижний колонтитул 5"/>
+          <p:cNvPr id="1775858809" name="Нижний колонтитул 5"/>
           <p:cNvSpPr>
             <a:spLocks noGrp="1"/>
           </p:cNvSpPr>
@@ -4420,7 +4428,7 @@
       </p:sp>
       <p:sp>
         <p:nvSpPr>
-          <p:cNvPr id="966395401" name="Номер слайда 6"/>
+          <p:cNvPr id="1479539114" name="Номер слайда 6"/>
           <p:cNvSpPr>
             <a:spLocks noGrp="1"/>
           </p:cNvSpPr>
@@ -4471,7 +4479,7 @@
       </p:grpSpPr>
       <p:sp>
         <p:nvSpPr>
-          <p:cNvPr id="696858830" name="Заголовок 1"/>
+          <p:cNvPr id="1132163325" name="Заголовок 1"/>
           <p:cNvSpPr>
             <a:spLocks noGrp="1"/>
           </p:cNvSpPr>
@@ -4506,7 +4514,7 @@
       </p:sp>
       <p:sp>
         <p:nvSpPr>
-          <p:cNvPr id="969899607" name="Рисунок 2"/>
+          <p:cNvPr id="715875871" name="Рисунок 2"/>
           <p:cNvSpPr>
             <a:spLocks noChangeAspect="1" noGrp="1"/>
           </p:cNvSpPr>
@@ -4574,7 +4582,7 @@
       </p:sp>
       <p:sp>
         <p:nvSpPr>
-          <p:cNvPr id="460102148" name="Текст 3"/>
+          <p:cNvPr id="992050502" name="Текст 3"/>
           <p:cNvSpPr>
             <a:spLocks noGrp="1"/>
           </p:cNvSpPr>
@@ -4642,7 +4650,7 @@
       </p:sp>
       <p:sp>
         <p:nvSpPr>
-          <p:cNvPr id="751014158" name="Дата 4"/>
+          <p:cNvPr id="802367344" name="Дата 4"/>
           <p:cNvSpPr>
             <a:spLocks noGrp="1"/>
           </p:cNvSpPr>
@@ -4668,7 +4676,7 @@
       </p:sp>
       <p:sp>
         <p:nvSpPr>
-          <p:cNvPr id="17848462" name="Нижний колонтитул 5"/>
+          <p:cNvPr id="601866165" name="Нижний колонтитул 5"/>
           <p:cNvSpPr>
             <a:spLocks noGrp="1"/>
           </p:cNvSpPr>
@@ -4690,7 +4698,7 @@
       </p:sp>
       <p:sp>
         <p:nvSpPr>
-          <p:cNvPr id="1002666269" name="Номер слайда 6"/>
+          <p:cNvPr id="1755169054" name="Номер слайда 6"/>
           <p:cNvSpPr>
             <a:spLocks noGrp="1"/>
           </p:cNvSpPr>
@@ -4746,7 +4754,7 @@
       </p:grpSpPr>
       <p:sp>
         <p:nvSpPr>
-          <p:cNvPr id="135437290" name="Заголовок 1"/>
+          <p:cNvPr id="1947430766" name="Заголовок 1"/>
           <p:cNvSpPr>
             <a:spLocks noGrp="1"/>
           </p:cNvSpPr>
@@ -4782,7 +4790,7 @@
       </p:sp>
       <p:sp>
         <p:nvSpPr>
-          <p:cNvPr id="1399859159" name="Текст 2"/>
+          <p:cNvPr id="1613870534" name="Текст 2"/>
           <p:cNvSpPr>
             <a:spLocks noGrp="1"/>
           </p:cNvSpPr>
@@ -4858,7 +4866,7 @@
       </p:sp>
       <p:sp>
         <p:nvSpPr>
-          <p:cNvPr id="1025806928" name="Дата 3"/>
+          <p:cNvPr id="1103202735" name="Дата 3"/>
           <p:cNvSpPr>
             <a:spLocks noGrp="1"/>
           </p:cNvSpPr>
@@ -4902,7 +4910,7 @@
       </p:sp>
       <p:sp>
         <p:nvSpPr>
-          <p:cNvPr id="1878096670" name="Нижний колонтитул 4"/>
+          <p:cNvPr id="1156015304" name="Нижний колонтитул 4"/>
           <p:cNvSpPr>
             <a:spLocks noGrp="1"/>
           </p:cNvSpPr>
@@ -4942,7 +4950,7 @@
       </p:sp>
       <p:sp>
         <p:nvSpPr>
-          <p:cNvPr id="289758480" name="Номер слайда 5"/>
+          <p:cNvPr id="1266160413" name="Номер слайда 5"/>
           <p:cNvSpPr>
             <a:spLocks noGrp="1"/>
           </p:cNvSpPr>
@@ -5302,7 +5310,7 @@
       </p:grpSpPr>
       <p:sp>
         <p:nvSpPr>
-          <p:cNvPr id="15699017" name="Title 1"/>
+          <p:cNvPr id="203646821" name="Title 1"/>
           <p:cNvSpPr>
             <a:spLocks noGrp="1"/>
           </p:cNvSpPr>
@@ -5368,7 +5376,7 @@
       </p:sp>
       <p:sp>
         <p:nvSpPr>
-          <p:cNvPr id="2005378915" name="Подзаголовок 2"/>
+          <p:cNvPr id="1892077871" name="Подзаголовок 2"/>
           <p:cNvSpPr>
             <a:spLocks noGrp="1"/>
           </p:cNvSpPr>
@@ -5520,7 +5528,7 @@
       </p:sp>
       <p:sp>
         <p:nvSpPr>
-          <p:cNvPr id="1507902462" name="Title 1"/>
+          <p:cNvPr id="1291837337" name="Title 1"/>
           <p:cNvSpPr>
             <a:spLocks noGrp="1"/>
           </p:cNvSpPr>
@@ -5612,7 +5620,7 @@
       </p:grpSpPr>
       <p:sp>
         <p:nvSpPr>
-          <p:cNvPr id="579567931" name="Заголовок 1"/>
+          <p:cNvPr id="1328325134" name="Заголовок 1"/>
           <p:cNvSpPr>
             <a:spLocks noGrp="1"/>
           </p:cNvSpPr>
@@ -5662,7 +5670,7 @@
       </p:sp>
       <p:sp>
         <p:nvSpPr>
-          <p:cNvPr id="1523173646" name="Объект 2"/>
+          <p:cNvPr id="1269234914" name="Объект 2"/>
           <p:cNvSpPr>
             <a:spLocks noGrp="1"/>
           </p:cNvSpPr>
@@ -5792,7 +5800,7 @@
       </p:grpSpPr>
       <p:sp>
         <p:nvSpPr>
-          <p:cNvPr id="250126459" name="Заголовок 1"/>
+          <p:cNvPr id="961409509" name="Заголовок 1"/>
           <p:cNvSpPr>
             <a:spLocks noGrp="1"/>
           </p:cNvSpPr>
@@ -5835,7 +5843,7 @@
       </p:sp>
       <p:sp>
         <p:nvSpPr>
-          <p:cNvPr id="2010847805" name="Объект 2"/>
+          <p:cNvPr id="745405015" name="Объект 2"/>
           <p:cNvSpPr>
             <a:spLocks noGrp="1"/>
           </p:cNvSpPr>
@@ -6056,7 +6064,7 @@
       </p:grpSpPr>
       <p:sp>
         <p:nvSpPr>
-          <p:cNvPr id="614327781" name="Заголовок 1"/>
+          <p:cNvPr id="1677189622" name="Заголовок 1"/>
           <p:cNvSpPr>
             <a:spLocks noGrp="1"/>
           </p:cNvSpPr>
@@ -6094,7 +6102,7 @@
       </p:sp>
       <p:sp>
         <p:nvSpPr>
-          <p:cNvPr id="60457754" name="Объект 2"/>
+          <p:cNvPr id="781998734" name="Объект 2"/>
           <p:cNvSpPr>
             <a:spLocks noGrp="1"/>
           </p:cNvSpPr>
@@ -6217,7 +6225,7 @@
       </p:sp>
       <p:pic>
         <p:nvPicPr>
-          <p:cNvPr id="1838975475" name="Рисунок 3" descr="Java — Википедия"/>
+          <p:cNvPr id="1937531423" name="Рисунок 3" descr="Java — Википедия"/>
           <p:cNvPicPr>
             <a:picLocks noChangeAspect="1"/>
           </p:cNvPicPr>
@@ -6239,7 +6247,7 @@
       </p:pic>
       <p:pic>
         <p:nvPicPr>
-          <p:cNvPr id="1864404941" name="Рисунок 4" descr="Файл:Spring Framework Logo 2018.svg — Википедия"/>
+          <p:cNvPr id="1139993922" name="Рисунок 4" descr="Файл:Spring Framework Logo 2018.svg — Википедия"/>
           <p:cNvPicPr>
             <a:picLocks noChangeAspect="1"/>
           </p:cNvPicPr>
@@ -6261,7 +6269,7 @@
       </p:pic>
       <p:pic>
         <p:nvPicPr>
-          <p:cNvPr id="2093882210" name="Рисунок 5" descr="PostgreSQL — Википедия"/>
+          <p:cNvPr id="991741366" name="Рисунок 5" descr="PostgreSQL — Википедия"/>
           <p:cNvPicPr>
             <a:picLocks noChangeAspect="1"/>
           </p:cNvPicPr>
@@ -6289,7 +6297,7 @@
       </p:pic>
       <p:pic>
         <p:nvPicPr>
-          <p:cNvPr id="947665508" name="Рисунок 6" descr="React Native — Википедия"/>
+          <p:cNvPr id="1912991812" name="Рисунок 6" descr="React Native — Википедия"/>
           <p:cNvPicPr>
             <a:picLocks noChangeAspect="1"/>
           </p:cNvPicPr>
@@ -6311,7 +6319,7 @@
       </p:pic>
       <p:pic>
         <p:nvPicPr>
-          <p:cNvPr id="529631334" name=""/>
+          <p:cNvPr id="814474353" name=""/>
           <p:cNvPicPr>
             <a:picLocks noChangeAspect="1"/>
           </p:cNvPicPr>
@@ -6333,7 +6341,7 @@
       </p:pic>
       <p:pic>
         <p:nvPicPr>
-          <p:cNvPr id="1336662440" name=""/>
+          <p:cNvPr id="604012158" name=""/>
           <p:cNvPicPr>
             <a:picLocks noChangeAspect="1"/>
           </p:cNvPicPr>
@@ -6388,7 +6396,7 @@
       </p:grpSpPr>
       <p:sp>
         <p:nvSpPr>
-          <p:cNvPr id="188301361" name="Заголовок 1"/>
+          <p:cNvPr id="1632997277" name="Заголовок 1"/>
           <p:cNvSpPr>
             <a:spLocks noGrp="1"/>
           </p:cNvSpPr>
@@ -6426,7 +6434,7 @@
       </p:sp>
       <p:sp>
         <p:nvSpPr>
-          <p:cNvPr id="30228531" name="Объект 2"/>
+          <p:cNvPr id="964063814" name="Объект 2"/>
           <p:cNvSpPr>
             <a:spLocks noGrp="1"/>
           </p:cNvSpPr>
@@ -6450,7 +6458,7 @@
       </p:sp>
       <p:pic>
         <p:nvPicPr>
-          <p:cNvPr id="959539368" name=""/>
+          <p:cNvPr id="1721323333" name=""/>
           <p:cNvPicPr>
             <a:picLocks noChangeAspect="1"/>
           </p:cNvPicPr>
@@ -6505,7 +6513,7 @@
       </p:grpSpPr>
       <p:sp>
         <p:nvSpPr>
-          <p:cNvPr id="468557338" name="Заголовок 1"/>
+          <p:cNvPr id="1163225923" name="Заголовок 1"/>
           <p:cNvSpPr>
             <a:spLocks noGrp="1"/>
           </p:cNvSpPr>
@@ -6543,7 +6551,7 @@
       </p:sp>
       <p:sp>
         <p:nvSpPr>
-          <p:cNvPr id="983059788" name="Объект 2"/>
+          <p:cNvPr id="569580153" name="Объект 2"/>
           <p:cNvSpPr>
             <a:spLocks noGrp="1"/>
           </p:cNvSpPr>
@@ -6659,7 +6667,7 @@
       </p:grpSpPr>
       <p:sp>
         <p:nvSpPr>
-          <p:cNvPr id="422745732" name="Заголовок 1"/>
+          <p:cNvPr id="1262556610" name="Заголовок 1"/>
           <p:cNvSpPr>
             <a:spLocks noGrp="1"/>
           </p:cNvSpPr>
@@ -6704,7 +6712,7 @@
       </p:sp>
       <p:sp>
         <p:nvSpPr>
-          <p:cNvPr id="283009064" name="Объект 2"/>
+          <p:cNvPr id="1469659735" name="Объект 2"/>
           <p:cNvSpPr>
             <a:spLocks noGrp="1"/>
           </p:cNvSpPr>
@@ -6761,7 +6769,7 @@
       </p:grpSpPr>
       <p:sp>
         <p:nvSpPr>
-          <p:cNvPr id="1127196309" name="Заголовок 1"/>
+          <p:cNvPr id="776973650" name="Заголовок 1"/>
           <p:cNvSpPr>
             <a:spLocks noGrp="1"/>
           </p:cNvSpPr>
@@ -6799,7 +6807,7 @@
       </p:sp>
       <p:sp>
         <p:nvSpPr>
-          <p:cNvPr id="968365512" name="Объект 2"/>
+          <p:cNvPr id="727575365" name="Объект 2"/>
           <p:cNvSpPr>
             <a:spLocks noGrp="1"/>
           </p:cNvSpPr>
@@ -6856,7 +6864,7 @@
       </p:grpSpPr>
       <p:sp>
         <p:nvSpPr>
-          <p:cNvPr id="904493067" name="Заголовок 1"/>
+          <p:cNvPr id="2091018856" name="Заголовок 1"/>
           <p:cNvSpPr>
             <a:spLocks noGrp="1"/>
           </p:cNvSpPr>
@@ -6894,7 +6902,7 @@
       </p:sp>
       <p:sp>
         <p:nvSpPr>
-          <p:cNvPr id="1582601755" name="Объект 2"/>
+          <p:cNvPr id="182023299" name="Объект 2"/>
           <p:cNvSpPr>
             <a:spLocks noGrp="1"/>
           </p:cNvSpPr>
@@ -6951,7 +6959,7 @@
       </p:grpSpPr>
       <p:sp>
         <p:nvSpPr>
-          <p:cNvPr id="433462537" name="Заголовок 1"/>
+          <p:cNvPr id="1893434778" name="Заголовок 1"/>
           <p:cNvSpPr>
             <a:spLocks noGrp="1"/>
           </p:cNvSpPr>
@@ -6989,7 +6997,7 @@
       </p:sp>
       <p:sp>
         <p:nvSpPr>
-          <p:cNvPr id="776608647" name="Объект 2"/>
+          <p:cNvPr id="767137576" name="Объект 2"/>
           <p:cNvSpPr>
             <a:spLocks noGrp="1"/>
           </p:cNvSpPr>
@@ -7046,7 +7054,7 @@
       </p:grpSpPr>
       <p:sp>
         <p:nvSpPr>
-          <p:cNvPr id="1203539459" name="Заголовок 1"/>
+          <p:cNvPr id="915835210" name="Заголовок 1"/>
           <p:cNvSpPr>
             <a:spLocks noGrp="1"/>
           </p:cNvSpPr>
@@ -7084,7 +7092,7 @@
       </p:sp>
       <p:sp>
         <p:nvSpPr>
-          <p:cNvPr id="1631663079" name="Объект 2"/>
+          <p:cNvPr id="361153576" name="Объект 2"/>
           <p:cNvSpPr>
             <a:spLocks noGrp="1"/>
           </p:cNvSpPr>
@@ -7141,7 +7149,7 @@
       </p:grpSpPr>
       <p:sp>
         <p:nvSpPr>
-          <p:cNvPr id="1005738700" name="Заголовок 1"/>
+          <p:cNvPr id="1300217515" name="Заголовок 1"/>
           <p:cNvSpPr>
             <a:spLocks noGrp="1"/>
           </p:cNvSpPr>
@@ -7179,7 +7187,7 @@
       </p:sp>
       <p:sp>
         <p:nvSpPr>
-          <p:cNvPr id="1565538602" name="Объект 2"/>
+          <p:cNvPr id="864013277" name="Объект 2"/>
           <p:cNvSpPr>
             <a:spLocks noGrp="1"/>
           </p:cNvSpPr>
@@ -7264,7 +7272,7 @@
       </p:grpSpPr>
       <p:sp>
         <p:nvSpPr>
-          <p:cNvPr id="1571296823" name="Заголовок 1"/>
+          <p:cNvPr id="1177083598" name="Заголовок 1"/>
           <p:cNvSpPr>
             <a:spLocks noGrp="1"/>
           </p:cNvSpPr>
@@ -7335,7 +7343,7 @@
       </p:grpSpPr>
       <p:sp>
         <p:nvSpPr>
-          <p:cNvPr id="1811548969" name="Заголовок 1"/>
+          <p:cNvPr id="1856507177" name="Заголовок 1"/>
           <p:cNvSpPr>
             <a:spLocks noGrp="1"/>
           </p:cNvSpPr>
@@ -7376,7 +7384,7 @@
       </p:sp>
       <p:sp>
         <p:nvSpPr>
-          <p:cNvPr id="468795552" name="Объект 2"/>
+          <p:cNvPr id="1548406909" name="Объект 2"/>
           <p:cNvSpPr>
             <a:spLocks noGrp="1"/>
           </p:cNvSpPr>
@@ -7535,7 +7543,7 @@
 </file>
 
 <file path=ppt/slides/slide4.xml><?xml version="1.0" encoding="utf-8"?>
-<p:sld xmlns:a="http://schemas.openxmlformats.org/drawingml/2006/main" xmlns:r="http://schemas.openxmlformats.org/officeDocument/2006/relationships" xmlns:p="http://schemas.openxmlformats.org/presentationml/2006/main" xmlns:m="http://schemas.openxmlformats.org/officeDocument/2006/math" xmlns:w="http://schemas.openxmlformats.org/wordprocessingml/2006/main" xmlns:mc="http://schemas.openxmlformats.org/markup-compatibility/2006" showMasterPhAnim="0" showMasterSp="1" show="1">
+<p:sld xmlns:a="http://schemas.openxmlformats.org/drawingml/2006/main" xmlns:r="http://schemas.openxmlformats.org/officeDocument/2006/relationships" xmlns:p="http://schemas.openxmlformats.org/presentationml/2006/main" xmlns:m="http://schemas.openxmlformats.org/officeDocument/2006/math" xmlns:w="http://schemas.openxmlformats.org/wordprocessingml/2006/main" xmlns:mc="http://schemas.openxmlformats.org/markup-compatibility/2006" showMasterPhAnim="0" showMasterSp="1" show="0">
   <p:cSld name="">
     <p:spTree>
       <p:nvGrpSpPr>
@@ -7553,7 +7561,7 @@
       </p:grpSpPr>
       <p:sp>
         <p:nvSpPr>
-          <p:cNvPr id="1513205688" name="Заголовок 1"/>
+          <p:cNvPr id="1653177801" name="Заголовок 1"/>
           <p:cNvSpPr>
             <a:spLocks noGrp="1"/>
           </p:cNvSpPr>
@@ -7594,7 +7602,7 @@
       </p:sp>
       <p:sp>
         <p:nvSpPr>
-          <p:cNvPr id="1660048838" name="Объект 2"/>
+          <p:cNvPr id="614251732" name="Объект 2"/>
           <p:cNvSpPr>
             <a:spLocks noGrp="1"/>
           </p:cNvSpPr>
@@ -7643,9 +7651,18 @@
                 <a:ea typeface="Consolas"/>
                 <a:cs typeface="Consolas"/>
               </a:rPr>
-              <a:t> только с личным гардеробом пользователя.
-</a:t>
-            </a:r>
+              <a:t> только с личным гардеробом пользователя.</a:t>
+            </a:r>
+            <a:br>
+              <a:rPr sz="2200" b="0" i="0" u="none">
+                <a:solidFill>
+                  <a:srgbClr val="000000"/>
+                </a:solidFill>
+                <a:latin typeface="Consolas"/>
+                <a:ea typeface="Consolas"/>
+                <a:cs typeface="Consolas"/>
+              </a:rPr>
+            </a:br>
             <a:endParaRPr sz="2200" b="0" i="0" u="none">
               <a:solidFill>
                 <a:srgbClr val="000000"/>
@@ -7703,7 +7720,7 @@
             <a:pPr>
               <a:defRPr/>
             </a:pPr>
-            <a:r>
+            <a:br>
               <a:rPr sz="2200" b="0" i="0" u="none">
                 <a:solidFill>
                   <a:srgbClr val="000000"/>
@@ -7712,8 +7729,17 @@
                 <a:ea typeface="Consolas"/>
                 <a:cs typeface="Consolas"/>
               </a:rPr>
-              <a:t>
-Интеграция регионального климата + текущей погоды + уровня теплоты каждой вещи.</a:t>
+            </a:br>
+            <a:r>
+              <a:rPr sz="2200" b="0" i="0" u="none">
+                <a:solidFill>
+                  <a:srgbClr val="000000"/>
+                </a:solidFill>
+                <a:latin typeface="Consolas"/>
+                <a:ea typeface="Consolas"/>
+                <a:cs typeface="Consolas"/>
+              </a:rPr>
+              <a:t>Интеграция регионального климата + текущей погоды + уровня теплоты каждой вещи.</a:t>
             </a:r>
             <a:endParaRPr sz="9000">
               <a:latin typeface="Consolas"/>
@@ -7757,7 +7783,7 @@
       </p:grpSpPr>
       <p:sp>
         <p:nvSpPr>
-          <p:cNvPr id="1575865463" name="Заголовок 1"/>
+          <p:cNvPr id="434520580" name="Заголовок 1"/>
           <p:cNvSpPr>
             <a:spLocks noGrp="1"/>
           </p:cNvSpPr>
@@ -7779,7 +7805,7 @@
               <a:defRPr/>
             </a:pPr>
             <a:r>
-              <a:rPr sz="4400" b="0" i="0" u="none" spc="-6">
+              <a:rPr sz="4400" b="0" i="0" u="none" spc="-5">
                 <a:solidFill>
                   <a:srgbClr val="000000"/>
                 </a:solidFill>
@@ -7798,7 +7824,7 @@
       </p:sp>
       <p:sp>
         <p:nvSpPr>
-          <p:cNvPr id="724340907" name="Объект 2"/>
+          <p:cNvPr id="717026826" name="Объект 2"/>
           <p:cNvSpPr>
             <a:spLocks noGrp="1"/>
           </p:cNvSpPr>
@@ -7848,9 +7874,18 @@
                 <a:ea typeface="Consolas"/>
                 <a:cs typeface="Consolas"/>
               </a:rPr>
-              <a:t>Тратит время на проверку погоды и перебор вещей.
-</a:t>
-            </a:r>
+              <a:t>Тратит время на проверку погоды и перебор вещей.</a:t>
+            </a:r>
+            <a:br>
+              <a:rPr sz="2000" b="0" i="0" u="none">
+                <a:solidFill>
+                  <a:srgbClr val="000000"/>
+                </a:solidFill>
+                <a:latin typeface="Consolas"/>
+                <a:ea typeface="Consolas"/>
+                <a:cs typeface="Consolas"/>
+              </a:rPr>
+            </a:br>
             <a:endParaRPr sz="2000" b="0" i="0" u="none">
               <a:solidFill>
                 <a:srgbClr val="000000"/>
@@ -7947,7 +7982,7 @@
       </p:grpSpPr>
       <p:sp>
         <p:nvSpPr>
-          <p:cNvPr id="80109594" name="Заголовок 1"/>
+          <p:cNvPr id="378022798" name="Заголовок 1"/>
           <p:cNvSpPr>
             <a:spLocks noGrp="1"/>
           </p:cNvSpPr>
@@ -7985,7 +8020,7 @@
       </p:sp>
       <p:sp>
         <p:nvSpPr>
-          <p:cNvPr id="674356193" name="Объект 2"/>
+          <p:cNvPr id="1389143353" name="Объект 2"/>
           <p:cNvSpPr>
             <a:spLocks noGrp="1"/>
           </p:cNvSpPr>
@@ -8323,7 +8358,7 @@
 </file>
 
 <file path=ppt/slides/slide7.xml><?xml version="1.0" encoding="utf-8"?>
-<p:sld xmlns:a="http://schemas.openxmlformats.org/drawingml/2006/main" xmlns:r="http://schemas.openxmlformats.org/officeDocument/2006/relationships" xmlns:p="http://schemas.openxmlformats.org/presentationml/2006/main" xmlns:m="http://schemas.openxmlformats.org/officeDocument/2006/math" xmlns:w="http://schemas.openxmlformats.org/wordprocessingml/2006/main" xmlns:mc="http://schemas.openxmlformats.org/markup-compatibility/2006" showMasterPhAnim="0" showMasterSp="1" show="1">
+<p:sld xmlns:a="http://schemas.openxmlformats.org/drawingml/2006/main" xmlns:r="http://schemas.openxmlformats.org/officeDocument/2006/relationships" xmlns:p="http://schemas.openxmlformats.org/presentationml/2006/main" xmlns:m="http://schemas.openxmlformats.org/officeDocument/2006/math" xmlns:w="http://schemas.openxmlformats.org/wordprocessingml/2006/main" xmlns:mc="http://schemas.openxmlformats.org/markup-compatibility/2006" showMasterPhAnim="0" showMasterSp="1" show="0">
   <p:cSld name="">
     <p:spTree>
       <p:nvGrpSpPr>
@@ -8341,7 +8376,7 @@
       </p:grpSpPr>
       <p:sp>
         <p:nvSpPr>
-          <p:cNvPr id="213476192" name="Заголовок 1"/>
+          <p:cNvPr id="1406385215" name="Заголовок 1"/>
           <p:cNvSpPr>
             <a:spLocks noGrp="1"/>
           </p:cNvSpPr>
@@ -8382,7 +8417,7 @@
       </p:sp>
       <p:sp>
         <p:nvSpPr>
-          <p:cNvPr id="2098857447" name="Объект 2"/>
+          <p:cNvPr id="84706243" name="Объект 2"/>
           <p:cNvSpPr>
             <a:spLocks noGrp="1"/>
           </p:cNvSpPr>
@@ -8553,7 +8588,7 @@
       </p:grpSpPr>
       <p:sp>
         <p:nvSpPr>
-          <p:cNvPr id="638929674" name="Заголовок 1"/>
+          <p:cNvPr id="1514952970" name="Заголовок 1"/>
           <p:cNvSpPr>
             <a:spLocks noGrp="1"/>
           </p:cNvSpPr>
@@ -8591,7 +8626,7 @@
       </p:sp>
       <p:sp>
         <p:nvSpPr>
-          <p:cNvPr id="1437602569" name="Объект 2"/>
+          <p:cNvPr id="1469075348" name="Объект 2"/>
           <p:cNvSpPr>
             <a:spLocks noGrp="1"/>
           </p:cNvSpPr>
@@ -8615,7 +8650,7 @@
       </p:sp>
       <p:graphicFrame>
         <p:nvGraphicFramePr>
-          <p:cNvPr id="492139244" name=""/>
+          <p:cNvPr id="508406015" name=""/>
           <p:cNvGraphicFramePr>
             <a:graphicFrameLocks xmlns:a="http://schemas.openxmlformats.org/drawingml/2006/main"/>
           </p:cNvGraphicFramePr>
@@ -9697,7 +9732,7 @@
                           <a:ea typeface="Times New Roman"/>
                           <a:cs typeface="Times New Roman"/>
                         </a:rPr>
-                        <a:t>+(AI)</a:t>
+                        <a:t>+</a:t>
                       </a:r>
                       <a:endParaRPr/>
                     </a:p>
@@ -9795,7 +9830,7 @@
 </file>
 
 <file path=ppt/slides/slide9.xml><?xml version="1.0" encoding="utf-8"?>
-<p:sld xmlns:a="http://schemas.openxmlformats.org/drawingml/2006/main" xmlns:r="http://schemas.openxmlformats.org/officeDocument/2006/relationships" xmlns:p="http://schemas.openxmlformats.org/presentationml/2006/main" xmlns:m="http://schemas.openxmlformats.org/officeDocument/2006/math" xmlns:w="http://schemas.openxmlformats.org/wordprocessingml/2006/main" xmlns:mc="http://schemas.openxmlformats.org/markup-compatibility/2006" showMasterPhAnim="0" showMasterSp="1" show="1">
+<p:sld xmlns:a="http://schemas.openxmlformats.org/drawingml/2006/main" xmlns:r="http://schemas.openxmlformats.org/officeDocument/2006/relationships" xmlns:p="http://schemas.openxmlformats.org/presentationml/2006/main" xmlns:m="http://schemas.openxmlformats.org/officeDocument/2006/math" xmlns:w="http://schemas.openxmlformats.org/wordprocessingml/2006/main" xmlns:mc="http://schemas.openxmlformats.org/markup-compatibility/2006" showMasterPhAnim="0" showMasterSp="1" show="0">
   <p:cSld name="">
     <p:spTree>
       <p:nvGrpSpPr>
@@ -9813,7 +9848,7 @@
       </p:grpSpPr>
       <p:sp>
         <p:nvSpPr>
-          <p:cNvPr id="871630707" name="Заголовок 1"/>
+          <p:cNvPr id="645224830" name="Заголовок 1"/>
           <p:cNvSpPr>
             <a:spLocks noGrp="1"/>
           </p:cNvSpPr>
@@ -9851,7 +9886,7 @@
       </p:sp>
       <p:sp>
         <p:nvSpPr>
-          <p:cNvPr id="703107414" name="Объект 2"/>
+          <p:cNvPr id="1364821227" name="Объект 2"/>
           <p:cNvSpPr>
             <a:spLocks noGrp="1"/>
           </p:cNvSpPr>
